--- a/test-data/master-intake/messy-corporate.pptx
+++ b/test-data/master-intake/messy-corporate.pptx
@@ -386,6 +386,256 @@
 
 <file path=ppt/slideLayouts/slideLayout3.xml><?xml version="1.0" encoding="utf-8"?>
 <p:sldLayout xmlns:a="http://schemas.openxmlformats.org/drawingml/2006/main" xmlns:p="http://schemas.openxmlformats.org/presentationml/2006/main" xmlns:r="http://schemas.openxmlformats.org/officeDocument/2006/relationships" preserve="1">
+  <p:cSld name="本文（幅広ヘッダー）">
+    <p:bg>
+      <p:bgPr>
+        <a:solidFill>
+          <a:srgbClr val="FFFFFF"/>
+        </a:solidFill>
+        <a:effectLst/>
+      </p:bgPr>
+    </p:bg>
+    <p:spTree>
+      <p:nvGrpSpPr>
+        <p:cNvPr id="1" name=""/>
+        <p:cNvGrpSpPr/>
+        <p:nvPr/>
+      </p:nvGrpSpPr>
+      <p:grpSpPr>
+        <a:xfrm>
+          <a:off x="0" y="0"/>
+          <a:ext cx="0" cy="0"/>
+          <a:chOff x="0" y="0"/>
+          <a:chExt cx="0" cy="0"/>
+        </a:xfrm>
+      </p:grpSpPr>
+      <p:sp>
+        <p:nvSpPr>
+          <p:cNvPr id="2" name="Bar 2"/>
+          <p:cNvSpPr/>
+          <p:nvPr/>
+        </p:nvSpPr>
+        <p:spPr>
+          <a:xfrm>
+            <a:off x="0" y="0"/>
+            <a:ext cx="12191695" cy="457200"/>
+          </a:xfrm>
+          <a:prstGeom prst="rect">
+            <a:avLst/>
+          </a:prstGeom>
+          <a:solidFill>
+            <a:srgbClr val="E8EEF5"/>
+          </a:solidFill>
+          <a:ln>
+            <a:noFill/>
+          </a:ln>
+        </p:spPr>
+        <p:txBody>
+          <a:bodyPr/>
+          <a:lstStyle/>
+          <a:p>
+            <a:endParaRPr/>
+          </a:p>
+        </p:txBody>
+      </p:sp>
+      <p:sp>
+        <p:nvSpPr>
+          <p:cNvPr id="3" name="オブジェクト 3"/>
+          <p:cNvSpPr>
+            <a:spLocks noGrp="1"/>
+          </p:cNvSpPr>
+          <p:nvPr>
+            <p:ph type="hdr" idx="20"/>
+          </p:nvPr>
+        </p:nvSpPr>
+        <p:spPr>
+          <a:xfrm>
+            <a:off x="457200" y="109728"/>
+            <a:ext cx="11247120" cy="237744"/>
+          </a:xfrm>
+        </p:spPr>
+        <p:txBody>
+          <a:bodyPr/>
+          <a:lstStyle/>
+          <a:p>
+            <a:r>
+              <a:rPr lang="ja-JP" sz="1000">
+                <a:solidFill>
+                  <a:srgbClr val="64748B"/>
+                </a:solidFill>
+              </a:rPr>
+              <a:t> </a:t>
+            </a:r>
+          </a:p>
+        </p:txBody>
+      </p:sp>
+      <p:sp>
+        <p:nvSpPr>
+          <p:cNvPr id="4" name="テキスト プレースホルダー"/>
+          <p:cNvSpPr>
+            <a:spLocks noGrp="1"/>
+          </p:cNvSpPr>
+          <p:nvPr>
+            <p:ph type="body" idx="1"/>
+          </p:nvPr>
+        </p:nvSpPr>
+        <p:spPr>
+          <a:xfrm>
+            <a:off x="548640" y="658368"/>
+            <a:ext cx="11064240" cy="822960"/>
+          </a:xfrm>
+        </p:spPr>
+        <p:txBody>
+          <a:bodyPr/>
+          <a:lstStyle/>
+          <a:p>
+            <a:r>
+              <a:rPr lang="ja-JP" sz="2400" b="1">
+                <a:solidFill>
+                  <a:srgbClr val="1F3A5F"/>
+                </a:solidFill>
+              </a:rPr>
+              <a:t> </a:t>
+            </a:r>
+          </a:p>
+        </p:txBody>
+      </p:sp>
+      <p:sp>
+        <p:nvSpPr>
+          <p:cNvPr id="5" name="本文"/>
+          <p:cNvSpPr>
+            <a:spLocks noGrp="1"/>
+          </p:cNvSpPr>
+          <p:nvPr>
+            <p:ph type="body" idx="2"/>
+          </p:nvPr>
+        </p:nvSpPr>
+        <p:spPr>
+          <a:xfrm>
+            <a:off x="548640" y="1691640"/>
+            <a:ext cx="11064240" cy="4480560"/>
+          </a:xfrm>
+        </p:spPr>
+        <p:txBody>
+          <a:bodyPr/>
+          <a:lstStyle/>
+          <a:p>
+            <a:r>
+              <a:rPr lang="ja-JP" sz="1400">
+                <a:solidFill>
+                  <a:srgbClr val="1A2430"/>
+                </a:solidFill>
+              </a:rPr>
+              <a:t> </a:t>
+            </a:r>
+          </a:p>
+        </p:txBody>
+      </p:sp>
+      <p:sp>
+        <p:nvSpPr>
+          <p:cNvPr id="10" name="日付"/>
+          <p:cNvSpPr>
+            <a:spLocks noGrp="1"/>
+          </p:cNvSpPr>
+          <p:nvPr>
+            <p:ph type="dt" sz="half" idx="21"/>
+          </p:nvPr>
+        </p:nvSpPr>
+        <p:spPr>
+          <a:xfrm>
+            <a:off x="457200" y="6437376"/>
+            <a:ext cx="2743200" cy="310896"/>
+          </a:xfrm>
+        </p:spPr>
+        <p:txBody>
+          <a:bodyPr/>
+          <a:lstStyle/>
+          <a:p>
+            <a:r>
+              <a:rPr lang="ja-JP" sz="1000">
+                <a:solidFill>
+                  <a:srgbClr val="64748B"/>
+                </a:solidFill>
+              </a:rPr>
+              <a:t> </a:t>
+            </a:r>
+          </a:p>
+        </p:txBody>
+      </p:sp>
+      <p:sp>
+        <p:nvSpPr>
+          <p:cNvPr id="11" name="フッター"/>
+          <p:cNvSpPr>
+            <a:spLocks noGrp="1"/>
+          </p:cNvSpPr>
+          <p:nvPr>
+            <p:ph type="ftr" sz="quarter" idx="22"/>
+          </p:nvPr>
+        </p:nvSpPr>
+        <p:spPr>
+          <a:xfrm>
+            <a:off x="4206240" y="6437376"/>
+            <a:ext cx="3749040" cy="310896"/>
+          </a:xfrm>
+        </p:spPr>
+        <p:txBody>
+          <a:bodyPr/>
+          <a:lstStyle/>
+          <a:p>
+            <a:pPr algn="ctr"/>
+            <a:r>
+              <a:rPr lang="ja-JP" sz="1000">
+                <a:solidFill>
+                  <a:srgbClr val="64748B"/>
+                </a:solidFill>
+              </a:rPr>
+              <a:t> </a:t>
+            </a:r>
+          </a:p>
+        </p:txBody>
+      </p:sp>
+      <p:sp>
+        <p:nvSpPr>
+          <p:cNvPr id="12" name="スライド番号"/>
+          <p:cNvSpPr>
+            <a:spLocks noGrp="1"/>
+          </p:cNvSpPr>
+          <p:nvPr>
+            <p:ph type="sldNum" sz="quarter" idx="23"/>
+          </p:nvPr>
+        </p:nvSpPr>
+        <p:spPr>
+          <a:xfrm>
+            <a:off x="9418320" y="6437376"/>
+            <a:ext cx="2286000" cy="310896"/>
+          </a:xfrm>
+        </p:spPr>
+        <p:txBody>
+          <a:bodyPr/>
+          <a:lstStyle/>
+          <a:p>
+            <a:pPr algn="r"/>
+            <a:r>
+              <a:rPr lang="ja-JP" sz="1000">
+                <a:solidFill>
+                  <a:srgbClr val="64748B"/>
+                </a:solidFill>
+              </a:rPr>
+              <a:t> </a:t>
+            </a:r>
+          </a:p>
+        </p:txBody>
+      </p:sp>
+    </p:spTree>
+  </p:cSld>
+  <p:clrMapOvr>
+    <a:masterClrMapping/>
+  </p:clrMapOvr>
+</p:sldLayout>
+</file>
+
+<file path=ppt/slideLayouts/slideLayout4.xml><?xml version="1.0" encoding="utf-8"?>
+<p:sldLayout xmlns:a="http://schemas.openxmlformats.org/drawingml/2006/main" xmlns:p="http://schemas.openxmlformats.org/presentationml/2006/main" xmlns:r="http://schemas.openxmlformats.org/officeDocument/2006/relationships" preserve="1">
   <p:cSld name="3カラム">
     <p:bg>
       <p:bgPr>
@@ -636,7 +886,7 @@
 </p:sldLayout>
 </file>
 
-<file path=ppt/slideLayouts/slideLayout4.xml><?xml version="1.0" encoding="utf-8"?>
+<file path=ppt/slideLayouts/slideLayout5.xml><?xml version="1.0" encoding="utf-8"?>
 <p:sldLayout xmlns:a="http://schemas.openxmlformats.org/drawingml/2006/main" xmlns:p="http://schemas.openxmlformats.org/presentationml/2006/main" xmlns:r="http://schemas.openxmlformats.org/officeDocument/2006/relationships" preserve="1">
   <p:cSld name="図＋説明">
     <p:bg>
@@ -1010,6 +1260,7 @@
     <p:sldLayoutId id="2147483650" r:id="rId2"/>
     <p:sldLayoutId id="2147483651" r:id="rId3"/>
     <p:sldLayoutId id="2147483652" r:id="rId4"/>
+    <p:sldLayoutId id="2147483653" r:id="rId5"/>
   </p:sldLayoutIdLst>
   <p:txStyles>
     <p:titleStyle>
